--- a/docs/links-26/presentations/Even-Keel-for-managers.pptx
+++ b/docs/links-26/presentations/Even-Keel-for-managers.pptx
@@ -1546,7 +1546,7 @@
           <a:p>
             <a:r>
               <a:rPr lang="en-US" dirty="0"/>
-              <a:t>Days at work stay at 219 a year (218.6 exactly; Monday to Saturday; Sunday is overtime), under the ceiling agreed on 1 October 2026. Late finishes average about five more a year each: three from the December staffing — three to the close every day, where today’s weekdays have two — and two from a Saturday with four to the close. Full weekends off are seven in 26 and never more than five weeks apart; 18 of the 21 working weeks keep one shift time. The average shift is two minutes longer.</a:t>
+              <a:t>Days at work stay at 219 a year (218.6 exactly; Monday to Saturday; Sunday is overtime), under the ceiling agreed on 1 October 2026. Late finishes average about five more a year each: three from the December staffing — three to the close every day, where today’s weekdays have two — and two from a Saturday with four to the close. Full weekends off are seven in 26 and never more than five weeks apart; 18 of the 21 working weeks keep one shift time. The average shift is about two minutes longer.</a:t>
             </a:r>
             <a:endParaRPr lang="en-US" dirty="0"/>
           </a:p>
@@ -7607,7 +7607,7 @@
                 <a:ea typeface="Inter" pitchFamily="34" charset="-122"/>
                 <a:cs typeface="Inter" pitchFamily="34" charset="-120"/>
               </a:rPr>
-              <a:t>Average shift 2 minutes longer</a:t>
+              <a:t>Average shift about 2 minutes longer</a:t>
             </a:r>
             <a:endParaRPr lang="en-US" sz="1300" dirty="0"/>
           </a:p>

--- a/docs/links-26/presentations/Even-Keel-for-managers.pptx
+++ b/docs/links-26/presentations/Even-Keel-for-managers.pptx
@@ -7389,7 +7389,7 @@
                 <a:ea typeface="Inter" pitchFamily="34" charset="-122"/>
                 <a:cs typeface="Inter" pitchFamily="34" charset="-120"/>
               </a:rPr>
-              <a:t>At most 5 days in a row (today 7)</a:t>
+              <a:t>At most 5 days in a row on the fixed rota (today 7)</a:t>
             </a:r>
             <a:endParaRPr lang="en-US" sz="1300" dirty="0"/>
           </a:p>

--- a/docs/links-26/presentations/Even-Keel-for-managers.pptx
+++ b/docs/links-26/presentations/Even-Keel-for-managers.pptx
@@ -4415,7 +4415,7 @@
                 <a:ea typeface="Inter" pitchFamily="34" charset="-122"/>
                 <a:cs typeface="Inter" pitchFamily="34" charset="-120"/>
               </a:rPr>
-              <a:t>Much closer to the December pattern on weekdays, Saturday and Sunday.</a:t>
+              <a:t>Much closer to the December pattern every day. The score: hour by hour, how far staffing sits from the trains; 0 would track them exactly.</a:t>
             </a:r>
             <a:endParaRPr lang="en-US" sz="1400" dirty="0"/>
           </a:p>
@@ -6380,7 +6380,7 @@
                 <a:ea typeface="Inter" pitchFamily="34" charset="-122"/>
                 <a:cs typeface="Inter" pitchFamily="34" charset="-120"/>
               </a:rPr>
-              <a:t>One shift time in 18 of 21 weeks, and no week over 41h 30m</a:t>
+              <a:t>What every link in this pack gives, what this one adds, and what it costs</a:t>
             </a:r>
             <a:endParaRPr lang="en-US" sz="1500" dirty="0"/>
           </a:p>
@@ -6483,7 +6483,7 @@
                 <a:ea typeface="Inter" pitchFamily="34" charset="-122"/>
                 <a:cs typeface="Inter" pitchFamily="34" charset="-120"/>
               </a:rPr>
-              <a:t>Meets all 9 December rules, and all 3 flexible ones</a:t>
+              <a:t>Every link here: all 9 December rules and the 3 flexible ones; no fatigue warning</a:t>
             </a:r>
             <a:endParaRPr lang="en-US" sz="1500" dirty="0"/>
           </a:p>
@@ -6586,7 +6586,7 @@
                 <a:ea typeface="Inter" pitchFamily="34" charset="-122"/>
                 <a:cs typeface="Inter" pitchFamily="34" charset="-120"/>
               </a:rPr>
-              <a:t>Seven full weekends off in 26, never more than five weeks apart</a:t>
+              <a:t>Every link here: about 14 full weekends off a year (today 10), at most 5 apart</a:t>
             </a:r>
             <a:endParaRPr lang="en-US" sz="1500" dirty="0"/>
           </a:p>
@@ -6689,7 +6689,7 @@
                 <a:ea typeface="Inter" pitchFamily="34" charset="-122"/>
                 <a:cs typeface="Inter" pitchFamily="34" charset="-120"/>
               </a:rPr>
-              <a:t>Never more than 5 days in a row in the fixed duties — today 7</a:t>
+              <a:t>Every link here: no shift over 9 hours, and every closing shift shorter</a:t>
             </a:r>
             <a:endParaRPr lang="en-US" sz="1500" dirty="0"/>
           </a:p>
@@ -6792,7 +6792,7 @@
                 <a:ea typeface="Inter" pitchFamily="34" charset="-122"/>
                 <a:cs typeface="Inter" pitchFamily="34" charset="-120"/>
               </a:rPr>
-              <a:t>8 of its 15 shift times are worked today</a:t>
+              <a:t>This one adds: no week over 41h 30m, and the longest rest between shifts, 14h 35m</a:t>
             </a:r>
             <a:endParaRPr lang="en-US" sz="1500" dirty="0"/>
           </a:p>
@@ -6895,7 +6895,7 @@
                 <a:ea typeface="Inter" pitchFamily="34" charset="-122"/>
                 <a:cs typeface="Inter" pitchFamily="34" charset="-120"/>
               </a:rPr>
-              <a:t>No shift over 9 hours, and every closing shift is shorter</a:t>
+              <a:t>8 of 15 shift times worked today; 7 new, four of them today’s lates starting later</a:t>
             </a:r>
             <a:endParaRPr lang="en-US" sz="1500" dirty="0"/>
           </a:p>
@@ -6959,7 +6959,7 @@
                 <a:ea typeface="Inter" pitchFamily="34" charset="-122"/>
                 <a:cs typeface="Inter" pitchFamily="34" charset="-120"/>
               </a:rPr>
-              <a:t>✓</a:t>
+              <a:t>–</a:t>
             </a:r>
             <a:endParaRPr lang="en-US" sz="1200" dirty="0"/>
           </a:p>
@@ -6998,7 +6998,7 @@
                 <a:ea typeface="Inter" pitchFamily="34" charset="-122"/>
                 <a:cs typeface="Inter" pitchFamily="34" charset="-120"/>
               </a:rPr>
-              <a:t>No avoidable fatigue warnings in the fixed rota</a:t>
+              <a:t>Costs: 44 late finishes a year (today 39), a mixed week, four weeks off 15 days not 14</a:t>
             </a:r>
             <a:endParaRPr lang="en-US" sz="1500" dirty="0"/>
           </a:p>
@@ -7064,7 +7064,7 @@
                 <a:ea typeface="Inter" pitchFamily="34" charset="-122"/>
                 <a:cs typeface="Inter" pitchFamily="34" charset="-120"/>
               </a:rPr>
-              <a:t>The trade-off: five more late finishes a year each (44, today 39), and seven new shift times.</a:t>
+              <a:t>Late finishes: 44 a year each (today 39) — two above the rules’ minimum, buying a fourth person to the Saturday close. The colleague deck shows every cost openly.</a:t>
             </a:r>
             <a:endParaRPr lang="en-US" sz="1400" dirty="0"/>
           </a:p>
@@ -7347,7 +7347,7 @@
                 <a:ea typeface="Inter" pitchFamily="34" charset="-122"/>
                 <a:cs typeface="Inter" pitchFamily="34" charset="-120"/>
               </a:rPr>
-              <a:t>7 weekends off, at most 5 weeks apart</a:t>
+              <a:t>14 full weekends off a year (today 10), at most 5 apart</a:t>
             </a:r>
             <a:endParaRPr lang="en-US" sz="1300" dirty="0"/>
           </a:p>

--- a/docs/links-26/presentations/Even-Keel-for-managers.pptx
+++ b/docs/links-26/presentations/Even-Keel-for-managers.pptx
@@ -5323,7 +5323,7 @@
                 <a:ea typeface="Inter" pitchFamily="34" charset="-122"/>
                 <a:cs typeface="Inter" pitchFamily="34" charset="-120"/>
               </a:rPr>
-              <a:t>Six more people, 35 hours a week on average — Sundays still rely on overtime.</a:t>
+              <a:t>Six more people, 35 hours a week on average; Sunday overtime 83h 30m a week across the link (today 68h 15m).</a:t>
             </a:r>
             <a:endParaRPr lang="en-US" sz="1400" dirty="0"/>
           </a:p>
@@ -7864,7 +7864,7 @@
                 <a:ea typeface="Inter" pitchFamily="34" charset="-122"/>
                 <a:cs typeface="Inter" pitchFamily="34" charset="-120"/>
               </a:rPr>
-              <a:t>Three things confirmed verbally (29 Sep and 1 Oct 2026), two decisions left</a:t>
+              <a:t>Three things confirmed verbally, two decisions left, two points still open</a:t>
             </a:r>
             <a:endParaRPr lang="en-US" sz="1500" dirty="0"/>
           </a:p>
@@ -8574,7 +8574,7 @@
                 <a:ea typeface="Inter" pitchFamily="34" charset="-122"/>
                 <a:cs typeface="Inter" pitchFamily="34" charset="-120"/>
               </a:rPr>
-              <a:t>Who begins on which week of the link.</a:t>
+              <a:t>Who begins on which week. Open: the 13-day limit’s written source; the FF19 reading.</a:t>
             </a:r>
             <a:endParaRPr lang="en-US" sz="1300" dirty="0"/>
           </a:p>

--- a/docs/links-26/presentations/Even-Keel-for-managers.pptx
+++ b/docs/links-26/presentations/Even-Keel-for-managers.pptx
@@ -1194,7 +1194,7 @@
           <a:p>
             <a:r>
               <a:rPr lang="en-US" dirty="0"/>
-              <a:t>The figure compares, hour by hour, the share of the day’s floor staff on duty with the share of the day’s train service, each train weighted by its length. 0 would be a perfect match. It is a guide to shape, not a staffing requirement — the rules on the previous slide are the requirement. Against today’s link, Even Keel’s score is a little over half on weekdays, about a fifth on a Saturday and about two-fifths on a Sunday; lower is closer.</a:t>
+              <a:t>The figure compares, hour by hour, the share of the day’s floor staff on duty with the share of the day’s train service, each train weighted by its length. 0 would be a perfect match. It is a guide to shape, not a staffing requirement — the rules on the previous slide are the requirement. Against today’s link, Even Keel’s score is a little over half on weekdays, about a fifth on a Saturday and about two-fifths on a Sunday; lower is closer. The score is a measure of the day’s shape only — not a staffing requirement or a passenger forecast.</a:t>
             </a:r>
             <a:endParaRPr lang="en-US" dirty="0"/>
           </a:p>
@@ -1370,7 +1370,7 @@
           <a:p>
             <a:r>
               <a:rPr lang="en-US" dirty="0"/>
-              <a:t>The ORR factors are good practice, not pass/fail limits, and this is not a fatigue risk assessment. Two factors — early starts at a 06:20 station and a weekly rotation — come with every weekly link, so they are recorded on the proposal sheet for information and not counted. One definition, successive start times varying by more than two hours, is counted on our reading and should be confirmed by whoever assesses it.</a:t>
+              <a:t>The ORR factors are good practice, not pass/fail limits, and this is not a fatigue risk assessment. Two factors — early starts at a 06:20 station and a weekly rotation — come with every weekly link, so they are recorded on the proposal sheet for information and not counted. One definition, successive start times varying by more than two hours, is counted on our reading and should be confirmed by whoever assesses it. Early starts and a weekly rotation come with every link, so they are not counted. The written source of the 13-day limit is still to be confirmed.</a:t>
             </a:r>
             <a:endParaRPr lang="en-US" dirty="0"/>
           </a:p>
@@ -2774,7 +2774,7 @@
                 <a:ea typeface="Inter" pitchFamily="34" charset="-122"/>
                 <a:cs typeface="Inter" pitchFamily="34" charset="-120"/>
               </a:rPr>
-              <a:t>contract rostered exactly, on average</a:t>
+              <a:t>contracted hours a week</a:t>
             </a:r>
             <a:endParaRPr lang="en-US" sz="1500" dirty="0"/>
           </a:p>
@@ -2813,7 +2813,7 @@
                 <a:ea typeface="Inter" pitchFamily="34" charset="-122"/>
                 <a:cs typeface="Inter" pitchFamily="34" charset="-120"/>
               </a:rPr>
-              <a:t>Monday to Saturday</a:t>
+              <a:t>rostered exactly, Mon–Sat average</a:t>
             </a:r>
             <a:endParaRPr lang="en-US" sz="1300" dirty="0"/>
           </a:p>
@@ -4423,45 +4423,6 @@
       </p:sp>
       <p:sp>
         <p:nvSpPr>
-          <p:cNvPr id="7" name="Text 4"/>
-          <p:cNvSpPr txBox="1"/>
-          <p:nvPr/>
-        </p:nvSpPr>
-        <p:spPr>
-          <a:xfrm>
-            <a:off x="4023360" y="4754880"/>
-            <a:ext cx="4663440" cy="310896"/>
-          </a:xfrm>
-          <a:prstGeom prst="rect">
-            <a:avLst/>
-          </a:prstGeom>
-          <a:noFill/>
-          <a:ln/>
-        </p:spPr>
-        <p:txBody>
-          <a:bodyPr wrap="square" lIns="0" tIns="0" rIns="0" bIns="0" rtlCol="0" anchor="t"/>
-          <a:lstStyle/>
-          <a:p>
-            <a:pPr algn="r" indent="0" marL="0">
-              <a:buNone/>
-            </a:pPr>
-            <a:r>
-              <a:rPr lang="en-US" sz="850" i="1" dirty="0">
-                <a:solidFill>
-                  <a:srgbClr val="5B6778"/>
-                </a:solidFill>
-                <a:latin typeface="Inter" pitchFamily="34" charset="0"/>
-                <a:ea typeface="Inter" pitchFamily="34" charset="-122"/>
-                <a:cs typeface="Inter" pitchFamily="34" charset="-120"/>
-              </a:rPr>
-              <a:t>A measure of the day’s shape only — not a staffing requirement or a passenger forecast.</a:t>
-            </a:r>
-            <a:endParaRPr lang="en-US" sz="850" dirty="0"/>
-          </a:p>
-        </p:txBody>
-      </p:sp>
-      <p:sp>
-        <p:nvSpPr>
           <p:cNvPr id="8" name="Text 5"/>
           <p:cNvSpPr txBox="1"/>
           <p:nvPr/>
@@ -6195,45 +6156,6 @@
               <a:t>Rest and run limits met with room to spare; no avoidable fatigue warnings in the fixed rota.</a:t>
             </a:r>
             <a:endParaRPr lang="en-US" sz="1400" dirty="0"/>
-          </a:p>
-        </p:txBody>
-      </p:sp>
-      <p:sp>
-        <p:nvSpPr>
-          <p:cNvPr id="24" name="Text 22"/>
-          <p:cNvSpPr txBox="1"/>
-          <p:nvPr/>
-        </p:nvSpPr>
-        <p:spPr>
-          <a:xfrm>
-            <a:off x="4023360" y="4754880"/>
-            <a:ext cx="4663440" cy="310896"/>
-          </a:xfrm>
-          <a:prstGeom prst="rect">
-            <a:avLst/>
-          </a:prstGeom>
-          <a:noFill/>
-          <a:ln/>
-        </p:spPr>
-        <p:txBody>
-          <a:bodyPr wrap="square" lIns="0" tIns="0" rIns="0" bIns="0" rtlCol="0" anchor="t"/>
-          <a:lstStyle/>
-          <a:p>
-            <a:pPr algn="r" indent="0" marL="0">
-              <a:buNone/>
-            </a:pPr>
-            <a:r>
-              <a:rPr lang="en-US" sz="850" i="1" dirty="0">
-                <a:solidFill>
-                  <a:srgbClr val="5B6778"/>
-                </a:solidFill>
-                <a:latin typeface="Inter" pitchFamily="34" charset="0"/>
-                <a:ea typeface="Inter" pitchFamily="34" charset="-122"/>
-                <a:cs typeface="Inter" pitchFamily="34" charset="-120"/>
-              </a:rPr>
-              <a:t>Early starts and a weekly rotation come with every link, so are not counted. The written source of the 13-day limit is still to be confirmed.</a:t>
-            </a:r>
-            <a:endParaRPr lang="en-US" sz="850" dirty="0"/>
           </a:p>
         </p:txBody>
       </p:sp>

--- a/docs/links-26/presentations/Even-Keel-for-managers.pptx
+++ b/docs/links-26/presentations/Even-Keel-for-managers.pptx
@@ -5035,7 +5035,7 @@
                 <a:ea typeface="Inter" pitchFamily="34" charset="-122"/>
                 <a:cs typeface="Inter" pitchFamily="34" charset="-120"/>
               </a:rPr>
-              <a:t>4 — 1 week in 5</a:t>
+              <a:t>4 in 20 (1 in 5)</a:t>
             </a:r>
             <a:endParaRPr lang="en-US" sz="1600" dirty="0"/>
           </a:p>
@@ -5074,7 +5074,7 @@
                 <a:ea typeface="Inter" pitchFamily="34" charset="-122"/>
                 <a:cs typeface="Inter" pitchFamily="34" charset="-120"/>
               </a:rPr>
-              <a:t>5 — 1 week in 5</a:t>
+              <a:t>5 in 26 (1 in 5.2)</a:t>
             </a:r>
             <a:endParaRPr lang="en-US" sz="1800" dirty="0"/>
           </a:p>
@@ -6302,7 +6302,7 @@
                 <a:ea typeface="Inter" pitchFamily="34" charset="-122"/>
                 <a:cs typeface="Inter" pitchFamily="34" charset="-120"/>
               </a:rPr>
-              <a:t>What every link in this pack gives, what this one adds, and what it costs</a:t>
+              <a:t>What all three shortlisted links give, what this one adds, and what it costs</a:t>
             </a:r>
             <a:endParaRPr lang="en-US" sz="1500" dirty="0"/>
           </a:p>
@@ -6405,7 +6405,7 @@
                 <a:ea typeface="Inter" pitchFamily="34" charset="-122"/>
                 <a:cs typeface="Inter" pitchFamily="34" charset="-120"/>
               </a:rPr>
-              <a:t>Every link here: all 9 December rules and the 3 flexible ones; no fatigue warning</a:t>
+              <a:t>All three shortlisted: all 9 December rules and the 3 flexible ones; no fatigue warning</a:t>
             </a:r>
             <a:endParaRPr lang="en-US" sz="1500" dirty="0"/>
           </a:p>
@@ -6508,7 +6508,7 @@
                 <a:ea typeface="Inter" pitchFamily="34" charset="-122"/>
                 <a:cs typeface="Inter" pitchFamily="34" charset="-120"/>
               </a:rPr>
-              <a:t>Every link here: about 14 full weekends off a year (today 10), at most 5 apart</a:t>
+              <a:t>All three shortlisted: about 14 full weekends off a year (today 10), at most 5 apart</a:t>
             </a:r>
             <a:endParaRPr lang="en-US" sz="1500" dirty="0"/>
           </a:p>
@@ -6611,7 +6611,7 @@
                 <a:ea typeface="Inter" pitchFamily="34" charset="-122"/>
                 <a:cs typeface="Inter" pitchFamily="34" charset="-120"/>
               </a:rPr>
-              <a:t>Every link here: no shift over 9 hours, and every closing shift shorter</a:t>
+              <a:t>All three shortlisted: no shift over 9 hours, and every closing shift shorter</a:t>
             </a:r>
             <a:endParaRPr lang="en-US" sz="1500" dirty="0"/>
           </a:p>
@@ -6817,7 +6817,7 @@
                 <a:ea typeface="Inter" pitchFamily="34" charset="-122"/>
                 <a:cs typeface="Inter" pitchFamily="34" charset="-120"/>
               </a:rPr>
-              <a:t>8 of 15 shift times worked today; 7 new, four of them today’s lates starting later</a:t>
+              <a:t>8 of 15 shift times worked today; 7 new, several shorter versions of today’s lates</a:t>
             </a:r>
             <a:endParaRPr lang="en-US" sz="1500" dirty="0"/>
           </a:p>

--- a/docs/links-26/presentations/Even-Keel-for-managers.pptx
+++ b/docs/links-26/presentations/Even-Keel-for-managers.pptx
@@ -6714,7 +6714,7 @@
                 <a:ea typeface="Inter" pitchFamily="34" charset="-122"/>
                 <a:cs typeface="Inter" pitchFamily="34" charset="-120"/>
               </a:rPr>
-              <a:t>This one adds: no week over 41h 30m, and the longest rest between shifts, 14h 35m</a:t>
+              <a:t>This one adds: no week over 41h 30m, and at least 14h 35m between shifts</a:t>
             </a:r>
             <a:endParaRPr lang="en-US" sz="1500" dirty="0"/>
           </a:p>

--- a/docs/links-26/presentations/Even-Keel-for-managers.pptx
+++ b/docs/links-26/presentations/Even-Keel-for-managers.pptx
@@ -2319,6 +2319,7 @@
                 <a:spcPts val="800"/>
               </a:spcAft>
               <a:buSzPct val="100000"/>
+              <a:buFont typeface="Inter" pitchFamily="34" charset="0"/>
               <a:buChar char="•"/>
             </a:pPr>
             <a:r>
@@ -2340,6 +2341,7 @@
                 <a:spcPts val="800"/>
               </a:spcAft>
               <a:buSzPct val="100000"/>
+              <a:buFont typeface="Inter" pitchFamily="34" charset="0"/>
               <a:buChar char="•"/>
             </a:pPr>
             <a:r>
@@ -2361,6 +2363,7 @@
                 <a:spcPts val="800"/>
               </a:spcAft>
               <a:buSzPct val="100000"/>
+              <a:buFont typeface="Inter" pitchFamily="34" charset="0"/>
               <a:buChar char="•"/>
             </a:pPr>
             <a:r>
@@ -2603,8 +2606,8 @@
         </p:nvSpPr>
         <p:spPr>
           <a:xfrm>
-            <a:off x="594360" y="2560320"/>
-            <a:ext cx="1600200" cy="640080"/>
+            <a:off x="525780" y="2560320"/>
+            <a:ext cx="1737360" cy="640080"/>
           </a:xfrm>
           <a:prstGeom prst="rect">
             <a:avLst/>
@@ -2628,7 +2631,19 @@
                 <a:ea typeface="Inter" pitchFamily="34" charset="-122"/>
                 <a:cs typeface="Inter" pitchFamily="34" charset="-120"/>
               </a:rPr>
-              <a:t>December rules met</a:t>
+              <a:t>December</a:t>
+            </a:r>
+            <a:br/>
+            <a:r>
+              <a:rPr lang="en-US" sz="1500" b="1" dirty="0">
+                <a:solidFill>
+                  <a:srgbClr val="1B2533"/>
+                </a:solidFill>
+                <a:latin typeface="Inter" pitchFamily="34" charset="0"/>
+                <a:ea typeface="Inter" pitchFamily="34" charset="-122"/>
+                <a:cs typeface="Inter" pitchFamily="34" charset="-120"/>
+              </a:rPr>
+              <a:t>rules met</a:t>
             </a:r>
             <a:endParaRPr lang="en-US" sz="1500" dirty="0"/>
           </a:p>
@@ -2642,8 +2657,8 @@
         </p:nvSpPr>
         <p:spPr>
           <a:xfrm>
-            <a:off x="594360" y="3200400"/>
-            <a:ext cx="1600200" cy="457200"/>
+            <a:off x="525780" y="3200400"/>
+            <a:ext cx="1737360" cy="457200"/>
           </a:xfrm>
           <a:prstGeom prst="rect">
             <a:avLst/>
@@ -2749,8 +2764,8 @@
         </p:nvSpPr>
         <p:spPr>
           <a:xfrm>
-            <a:off x="2697480" y="2560320"/>
-            <a:ext cx="1600200" cy="640080"/>
+            <a:off x="2628900" y="2560320"/>
+            <a:ext cx="1737360" cy="640080"/>
           </a:xfrm>
           <a:prstGeom prst="rect">
             <a:avLst/>
@@ -2774,7 +2789,19 @@
                 <a:ea typeface="Inter" pitchFamily="34" charset="-122"/>
                 <a:cs typeface="Inter" pitchFamily="34" charset="-120"/>
               </a:rPr>
-              <a:t>contracted hours a week</a:t>
+              <a:t>contracted hours</a:t>
+            </a:r>
+            <a:br/>
+            <a:r>
+              <a:rPr lang="en-US" sz="1500" b="1" dirty="0">
+                <a:solidFill>
+                  <a:srgbClr val="1B2533"/>
+                </a:solidFill>
+                <a:latin typeface="Inter" pitchFamily="34" charset="0"/>
+                <a:ea typeface="Inter" pitchFamily="34" charset="-122"/>
+                <a:cs typeface="Inter" pitchFamily="34" charset="-120"/>
+              </a:rPr>
+              <a:t>a week</a:t>
             </a:r>
             <a:endParaRPr lang="en-US" sz="1500" dirty="0"/>
           </a:p>
@@ -2788,8 +2815,8 @@
         </p:nvSpPr>
         <p:spPr>
           <a:xfrm>
-            <a:off x="2697480" y="3200400"/>
-            <a:ext cx="1600200" cy="457200"/>
+            <a:off x="2628900" y="3200400"/>
+            <a:ext cx="1737360" cy="457200"/>
           </a:xfrm>
           <a:prstGeom prst="rect">
             <a:avLst/>
@@ -2813,7 +2840,7 @@
                 <a:ea typeface="Inter" pitchFamily="34" charset="-122"/>
                 <a:cs typeface="Inter" pitchFamily="34" charset="-120"/>
               </a:rPr>
-              <a:t>rostered exactly, Mon–Sat average</a:t>
+              <a:t>Mon–Sat average</a:t>
             </a:r>
             <a:endParaRPr lang="en-US" sz="1300" dirty="0"/>
           </a:p>
@@ -2895,8 +2922,8 @@
         </p:nvSpPr>
         <p:spPr>
           <a:xfrm>
-            <a:off x="4800600" y="2560320"/>
-            <a:ext cx="1600200" cy="640080"/>
+            <a:off x="4732020" y="2560320"/>
+            <a:ext cx="1737360" cy="640080"/>
           </a:xfrm>
           <a:prstGeom prst="rect">
             <a:avLst/>
@@ -2920,7 +2947,19 @@
                 <a:ea typeface="Inter" pitchFamily="34" charset="-122"/>
                 <a:cs typeface="Inter" pitchFamily="34" charset="-120"/>
               </a:rPr>
-              <a:t>avoidable fatigue warnings</a:t>
+              <a:t>avoidable</a:t>
+            </a:r>
+            <a:br/>
+            <a:r>
+              <a:rPr lang="en-US" sz="1500" b="1" dirty="0">
+                <a:solidFill>
+                  <a:srgbClr val="1B2533"/>
+                </a:solidFill>
+                <a:latin typeface="Inter" pitchFamily="34" charset="0"/>
+                <a:ea typeface="Inter" pitchFamily="34" charset="-122"/>
+                <a:cs typeface="Inter" pitchFamily="34" charset="-120"/>
+              </a:rPr>
+              <a:t>fatigue warnings</a:t>
             </a:r>
             <a:endParaRPr lang="en-US" sz="1500" dirty="0"/>
           </a:p>
@@ -2934,8 +2973,8 @@
         </p:nvSpPr>
         <p:spPr>
           <a:xfrm>
-            <a:off x="4800600" y="3200400"/>
-            <a:ext cx="1600200" cy="457200"/>
+            <a:off x="4732020" y="3200400"/>
+            <a:ext cx="1737360" cy="457200"/>
           </a:xfrm>
           <a:prstGeom prst="rect">
             <a:avLst/>
@@ -2959,7 +2998,7 @@
                 <a:ea typeface="Inter" pitchFamily="34" charset="-122"/>
                 <a:cs typeface="Inter" pitchFamily="34" charset="-120"/>
               </a:rPr>
-              <a:t>in the fixed rota · today 4</a:t>
+              <a:t>fixed rota · today 4</a:t>
             </a:r>
             <a:endParaRPr lang="en-US" sz="1300" dirty="0"/>
           </a:p>
@@ -3041,8 +3080,8 @@
         </p:nvSpPr>
         <p:spPr>
           <a:xfrm>
-            <a:off x="6903720" y="2560320"/>
-            <a:ext cx="1600200" cy="640080"/>
+            <a:off x="6835140" y="2560320"/>
+            <a:ext cx="1737360" cy="640080"/>
           </a:xfrm>
           <a:prstGeom prst="rect">
             <a:avLst/>
@@ -3066,7 +3105,19 @@
                 <a:ea typeface="Inter" pitchFamily="34" charset="-122"/>
                 <a:cs typeface="Inter" pitchFamily="34" charset="-120"/>
               </a:rPr>
-              <a:t>people on the link</a:t>
+              <a:t>people</a:t>
+            </a:r>
+            <a:br/>
+            <a:r>
+              <a:rPr lang="en-US" sz="1500" b="1" dirty="0">
+                <a:solidFill>
+                  <a:srgbClr val="1B2533"/>
+                </a:solidFill>
+                <a:latin typeface="Inter" pitchFamily="34" charset="0"/>
+                <a:ea typeface="Inter" pitchFamily="34" charset="-122"/>
+                <a:cs typeface="Inter" pitchFamily="34" charset="-120"/>
+              </a:rPr>
+              <a:t>on the link</a:t>
             </a:r>
             <a:endParaRPr lang="en-US" sz="1500" dirty="0"/>
           </a:p>
@@ -3080,8 +3131,8 @@
         </p:nvSpPr>
         <p:spPr>
           <a:xfrm>
-            <a:off x="6903720" y="3200400"/>
-            <a:ext cx="1600200" cy="457200"/>
+            <a:off x="6835140" y="3200400"/>
+            <a:ext cx="1737360" cy="457200"/>
           </a:xfrm>
           <a:prstGeom prst="rect">
             <a:avLst/>
@@ -3210,7 +3261,7 @@
                 <a:ea typeface="Inter" pitchFamily="34" charset="-122"/>
                 <a:cs typeface="Inter" pitchFamily="34" charset="-120"/>
               </a:rPr>
-              <a:t>Even Keel · December 2026 CEA link · for managers · 2</a:t>
+              <a:t>Even Keel · December 2026 link proposal · for managers · 2</a:t>
             </a:r>
             <a:endParaRPr lang="en-US" sz="900" dirty="0"/>
           </a:p>
@@ -3334,8 +3385,8 @@
         </p:nvSpPr>
         <p:spPr>
           <a:xfrm>
-            <a:off x="4297680" y="1417320"/>
-            <a:ext cx="2194560" cy="320040"/>
+            <a:off x="4663440" y="1417320"/>
+            <a:ext cx="2011680" cy="320040"/>
           </a:xfrm>
           <a:prstGeom prst="rect">
             <a:avLst/>
@@ -3373,8 +3424,8 @@
         </p:nvSpPr>
         <p:spPr>
           <a:xfrm>
-            <a:off x="6492240" y="1417320"/>
-            <a:ext cx="2194560" cy="320040"/>
+            <a:off x="6675120" y="1417320"/>
+            <a:ext cx="2011680" cy="320040"/>
           </a:xfrm>
           <a:prstGeom prst="rect">
             <a:avLst/>
@@ -3440,7 +3491,7 @@
         <p:spPr>
           <a:xfrm>
             <a:off x="640080" y="1801368"/>
-            <a:ext cx="3657600" cy="365760"/>
+            <a:ext cx="4023360" cy="365760"/>
           </a:xfrm>
           <a:prstGeom prst="rect">
             <a:avLst/>
@@ -3478,8 +3529,8 @@
         </p:nvSpPr>
         <p:spPr>
           <a:xfrm>
-            <a:off x="4297680" y="1801368"/>
-            <a:ext cx="2194560" cy="365760"/>
+            <a:off x="4663440" y="1801368"/>
+            <a:ext cx="2011680" cy="365760"/>
           </a:xfrm>
           <a:prstGeom prst="rect">
             <a:avLst/>
@@ -3517,8 +3568,8 @@
         </p:nvSpPr>
         <p:spPr>
           <a:xfrm>
-            <a:off x="6492240" y="1801368"/>
-            <a:ext cx="2194560" cy="365760"/>
+            <a:off x="6675120" y="1801368"/>
+            <a:ext cx="2011680" cy="365760"/>
           </a:xfrm>
           <a:prstGeom prst="rect">
             <a:avLst/>
@@ -3556,7 +3607,7 @@
         </p:nvSpPr>
         <p:spPr>
           <a:xfrm>
-            <a:off x="457200" y="2258568"/>
+            <a:off x="457200" y="2240280"/>
             <a:ext cx="8229600" cy="365760"/>
           </a:xfrm>
           <a:prstGeom prst="roundRect">
@@ -3583,8 +3634,8 @@
         </p:nvSpPr>
         <p:spPr>
           <a:xfrm>
-            <a:off x="640080" y="2258568"/>
-            <a:ext cx="3657600" cy="365760"/>
+            <a:off x="640080" y="2240280"/>
+            <a:ext cx="4023360" cy="365760"/>
           </a:xfrm>
           <a:prstGeom prst="rect">
             <a:avLst/>
@@ -3622,8 +3673,8 @@
         </p:nvSpPr>
         <p:spPr>
           <a:xfrm>
-            <a:off x="4297680" y="2258568"/>
-            <a:ext cx="2194560" cy="365760"/>
+            <a:off x="4663440" y="2240280"/>
+            <a:ext cx="2011680" cy="365760"/>
           </a:xfrm>
           <a:prstGeom prst="rect">
             <a:avLst/>
@@ -3661,8 +3712,8 @@
         </p:nvSpPr>
         <p:spPr>
           <a:xfrm>
-            <a:off x="6492240" y="2258568"/>
-            <a:ext cx="2194560" cy="365760"/>
+            <a:off x="6675120" y="2240280"/>
+            <a:ext cx="2011680" cy="365760"/>
           </a:xfrm>
           <a:prstGeom prst="rect">
             <a:avLst/>
@@ -3700,7 +3751,7 @@
         </p:nvSpPr>
         <p:spPr>
           <a:xfrm>
-            <a:off x="457200" y="2715768"/>
+            <a:off x="457200" y="2679192"/>
             <a:ext cx="8229600" cy="365760"/>
           </a:xfrm>
           <a:prstGeom prst="roundRect">
@@ -3727,8 +3778,8 @@
         </p:nvSpPr>
         <p:spPr>
           <a:xfrm>
-            <a:off x="640080" y="2715768"/>
-            <a:ext cx="3657600" cy="365760"/>
+            <a:off x="640080" y="2679192"/>
+            <a:ext cx="4023360" cy="365760"/>
           </a:xfrm>
           <a:prstGeom prst="rect">
             <a:avLst/>
@@ -3766,8 +3817,8 @@
         </p:nvSpPr>
         <p:spPr>
           <a:xfrm>
-            <a:off x="4297680" y="2715768"/>
-            <a:ext cx="2194560" cy="365760"/>
+            <a:off x="4663440" y="2679192"/>
+            <a:ext cx="2011680" cy="365760"/>
           </a:xfrm>
           <a:prstGeom prst="rect">
             <a:avLst/>
@@ -3805,8 +3856,8 @@
         </p:nvSpPr>
         <p:spPr>
           <a:xfrm>
-            <a:off x="6492240" y="2715768"/>
-            <a:ext cx="2194560" cy="365760"/>
+            <a:off x="6675120" y="2679192"/>
+            <a:ext cx="2011680" cy="365760"/>
           </a:xfrm>
           <a:prstGeom prst="rect">
             <a:avLst/>
@@ -3844,7 +3895,7 @@
         </p:nvSpPr>
         <p:spPr>
           <a:xfrm>
-            <a:off x="457200" y="3172968"/>
+            <a:off x="457200" y="3118104"/>
             <a:ext cx="8229600" cy="365760"/>
           </a:xfrm>
           <a:prstGeom prst="roundRect">
@@ -3871,8 +3922,8 @@
         </p:nvSpPr>
         <p:spPr>
           <a:xfrm>
-            <a:off x="640080" y="3172968"/>
-            <a:ext cx="3657600" cy="365760"/>
+            <a:off x="640080" y="3118104"/>
+            <a:ext cx="4023360" cy="365760"/>
           </a:xfrm>
           <a:prstGeom prst="rect">
             <a:avLst/>
@@ -3910,8 +3961,8 @@
         </p:nvSpPr>
         <p:spPr>
           <a:xfrm>
-            <a:off x="4297680" y="3172968"/>
-            <a:ext cx="2194560" cy="365760"/>
+            <a:off x="4663440" y="3118104"/>
+            <a:ext cx="2011680" cy="365760"/>
           </a:xfrm>
           <a:prstGeom prst="rect">
             <a:avLst/>
@@ -3949,8 +4000,8 @@
         </p:nvSpPr>
         <p:spPr>
           <a:xfrm>
-            <a:off x="6492240" y="3172968"/>
-            <a:ext cx="2194560" cy="365760"/>
+            <a:off x="6675120" y="3118104"/>
+            <a:ext cx="2011680" cy="365760"/>
           </a:xfrm>
           <a:prstGeom prst="rect">
             <a:avLst/>
@@ -3988,7 +4039,7 @@
         </p:nvSpPr>
         <p:spPr>
           <a:xfrm>
-            <a:off x="457200" y="3630168"/>
+            <a:off x="457200" y="3557016"/>
             <a:ext cx="8229600" cy="365760"/>
           </a:xfrm>
           <a:prstGeom prst="roundRect">
@@ -4015,8 +4066,8 @@
         </p:nvSpPr>
         <p:spPr>
           <a:xfrm>
-            <a:off x="640080" y="3630168"/>
-            <a:ext cx="3657600" cy="365760"/>
+            <a:off x="640080" y="3557016"/>
+            <a:ext cx="4023360" cy="365760"/>
           </a:xfrm>
           <a:prstGeom prst="rect">
             <a:avLst/>
@@ -4054,8 +4105,8 @@
         </p:nvSpPr>
         <p:spPr>
           <a:xfrm>
-            <a:off x="4297680" y="3630168"/>
-            <a:ext cx="2194560" cy="365760"/>
+            <a:off x="4663440" y="3557016"/>
+            <a:ext cx="2011680" cy="365760"/>
           </a:xfrm>
           <a:prstGeom prst="rect">
             <a:avLst/>
@@ -4093,8 +4144,8 @@
         </p:nvSpPr>
         <p:spPr>
           <a:xfrm>
-            <a:off x="6492240" y="3630168"/>
-            <a:ext cx="2194560" cy="365760"/>
+            <a:off x="6675120" y="3557016"/>
+            <a:ext cx="2011680" cy="365760"/>
           </a:xfrm>
           <a:prstGeom prst="rect">
             <a:avLst/>
@@ -4223,7 +4274,7 @@
                 <a:ea typeface="Inter" pitchFamily="34" charset="-122"/>
                 <a:cs typeface="Inter" pitchFamily="34" charset="-120"/>
               </a:rPr>
-              <a:t>Even Keel · December 2026 CEA link · for managers · 3</a:t>
+              <a:t>Even Keel · December 2026 link proposal · for managers · 3</a:t>
             </a:r>
             <a:endParaRPr lang="en-US" sz="900" dirty="0"/>
           </a:p>
@@ -4454,7 +4505,7 @@
                 <a:ea typeface="Inter" pitchFamily="34" charset="-122"/>
                 <a:cs typeface="Inter" pitchFamily="34" charset="-120"/>
               </a:rPr>
-              <a:t>Even Keel · December 2026 CEA link · for managers · 4</a:t>
+              <a:t>Even Keel · December 2026 link proposal · for managers · 4</a:t>
             </a:r>
             <a:endParaRPr lang="en-US" sz="900" dirty="0"/>
           </a:p>
@@ -4578,8 +4629,8 @@
         </p:nvSpPr>
         <p:spPr>
           <a:xfrm>
-            <a:off x="4297680" y="1417320"/>
-            <a:ext cx="2194560" cy="320040"/>
+            <a:off x="4663440" y="1417320"/>
+            <a:ext cx="2011680" cy="320040"/>
           </a:xfrm>
           <a:prstGeom prst="rect">
             <a:avLst/>
@@ -4617,8 +4668,8 @@
         </p:nvSpPr>
         <p:spPr>
           <a:xfrm>
-            <a:off x="6492240" y="1417320"/>
-            <a:ext cx="2194560" cy="320040"/>
+            <a:off x="6675120" y="1417320"/>
+            <a:ext cx="2011680" cy="320040"/>
           </a:xfrm>
           <a:prstGeom prst="rect">
             <a:avLst/>
@@ -4657,7 +4708,7 @@
         <p:spPr>
           <a:xfrm>
             <a:off x="457200" y="1801368"/>
-            <a:ext cx="8229600" cy="475488"/>
+            <a:ext cx="8229600" cy="365760"/>
           </a:xfrm>
           <a:prstGeom prst="roundRect">
             <a:avLst>
@@ -4684,7 +4735,7 @@
         <p:spPr>
           <a:xfrm>
             <a:off x="640080" y="1801368"/>
-            <a:ext cx="3657600" cy="475488"/>
+            <a:ext cx="4023360" cy="365760"/>
           </a:xfrm>
           <a:prstGeom prst="rect">
             <a:avLst/>
@@ -4722,8 +4773,8 @@
         </p:nvSpPr>
         <p:spPr>
           <a:xfrm>
-            <a:off x="4297680" y="1801368"/>
-            <a:ext cx="2194560" cy="475488"/>
+            <a:off x="4663440" y="1801368"/>
+            <a:ext cx="2011680" cy="365760"/>
           </a:xfrm>
           <a:prstGeom prst="rect">
             <a:avLst/>
@@ -4761,8 +4812,8 @@
         </p:nvSpPr>
         <p:spPr>
           <a:xfrm>
-            <a:off x="6492240" y="1801368"/>
-            <a:ext cx="2194560" cy="475488"/>
+            <a:off x="6675120" y="1801368"/>
+            <a:ext cx="2011680" cy="365760"/>
           </a:xfrm>
           <a:prstGeom prst="rect">
             <a:avLst/>
@@ -4800,8 +4851,8 @@
         </p:nvSpPr>
         <p:spPr>
           <a:xfrm>
-            <a:off x="457200" y="2368296"/>
-            <a:ext cx="8229600" cy="475488"/>
+            <a:off x="457200" y="2240280"/>
+            <a:ext cx="8229600" cy="365760"/>
           </a:xfrm>
           <a:prstGeom prst="roundRect">
             <a:avLst>
@@ -4827,8 +4878,8 @@
         </p:nvSpPr>
         <p:spPr>
           <a:xfrm>
-            <a:off x="640080" y="2368296"/>
-            <a:ext cx="3657600" cy="475488"/>
+            <a:off x="640080" y="2240280"/>
+            <a:ext cx="4023360" cy="365760"/>
           </a:xfrm>
           <a:prstGeom prst="rect">
             <a:avLst/>
@@ -4866,8 +4917,8 @@
         </p:nvSpPr>
         <p:spPr>
           <a:xfrm>
-            <a:off x="4297680" y="2368296"/>
-            <a:ext cx="2194560" cy="475488"/>
+            <a:off x="4663440" y="2240280"/>
+            <a:ext cx="2011680" cy="365760"/>
           </a:xfrm>
           <a:prstGeom prst="rect">
             <a:avLst/>
@@ -4905,8 +4956,8 @@
         </p:nvSpPr>
         <p:spPr>
           <a:xfrm>
-            <a:off x="6492240" y="2368296"/>
-            <a:ext cx="2194560" cy="475488"/>
+            <a:off x="6675120" y="2240280"/>
+            <a:ext cx="2011680" cy="365760"/>
           </a:xfrm>
           <a:prstGeom prst="rect">
             <a:avLst/>
@@ -4944,8 +4995,8 @@
         </p:nvSpPr>
         <p:spPr>
           <a:xfrm>
-            <a:off x="457200" y="2935224"/>
-            <a:ext cx="8229600" cy="475488"/>
+            <a:off x="457200" y="2679192"/>
+            <a:ext cx="8229600" cy="365760"/>
           </a:xfrm>
           <a:prstGeom prst="roundRect">
             <a:avLst>
@@ -4971,8 +5022,8 @@
         </p:nvSpPr>
         <p:spPr>
           <a:xfrm>
-            <a:off x="640080" y="2935224"/>
-            <a:ext cx="3657600" cy="475488"/>
+            <a:off x="640080" y="2679192"/>
+            <a:ext cx="4023360" cy="365760"/>
           </a:xfrm>
           <a:prstGeom prst="rect">
             <a:avLst/>
@@ -5010,8 +5061,8 @@
         </p:nvSpPr>
         <p:spPr>
           <a:xfrm>
-            <a:off x="4297680" y="2935224"/>
-            <a:ext cx="2194560" cy="475488"/>
+            <a:off x="4663440" y="2679192"/>
+            <a:ext cx="2011680" cy="365760"/>
           </a:xfrm>
           <a:prstGeom prst="rect">
             <a:avLst/>
@@ -5049,8 +5100,8 @@
         </p:nvSpPr>
         <p:spPr>
           <a:xfrm>
-            <a:off x="6492240" y="2935224"/>
-            <a:ext cx="2194560" cy="475488"/>
+            <a:off x="6675120" y="2679192"/>
+            <a:ext cx="2011680" cy="365760"/>
           </a:xfrm>
           <a:prstGeom prst="rect">
             <a:avLst/>
@@ -5088,8 +5139,8 @@
         </p:nvSpPr>
         <p:spPr>
           <a:xfrm>
-            <a:off x="457200" y="3502152"/>
-            <a:ext cx="8229600" cy="475488"/>
+            <a:off x="457200" y="3118104"/>
+            <a:ext cx="8229600" cy="365760"/>
           </a:xfrm>
           <a:prstGeom prst="roundRect">
             <a:avLst>
@@ -5115,8 +5166,8 @@
         </p:nvSpPr>
         <p:spPr>
           <a:xfrm>
-            <a:off x="640080" y="3502152"/>
-            <a:ext cx="3657600" cy="475488"/>
+            <a:off x="640080" y="3118104"/>
+            <a:ext cx="4023360" cy="365760"/>
           </a:xfrm>
           <a:prstGeom prst="rect">
             <a:avLst/>
@@ -5154,8 +5205,8 @@
         </p:nvSpPr>
         <p:spPr>
           <a:xfrm>
-            <a:off x="4297680" y="3502152"/>
-            <a:ext cx="2194560" cy="475488"/>
+            <a:off x="4663440" y="3118104"/>
+            <a:ext cx="2011680" cy="365760"/>
           </a:xfrm>
           <a:prstGeom prst="rect">
             <a:avLst/>
@@ -5193,8 +5244,8 @@
         </p:nvSpPr>
         <p:spPr>
           <a:xfrm>
-            <a:off x="6492240" y="3502152"/>
-            <a:ext cx="2194560" cy="475488"/>
+            <a:off x="6675120" y="3118104"/>
+            <a:ext cx="2011680" cy="365760"/>
           </a:xfrm>
           <a:prstGeom prst="rect">
             <a:avLst/>
@@ -5323,7 +5374,7 @@
                 <a:ea typeface="Inter" pitchFamily="34" charset="-122"/>
                 <a:cs typeface="Inter" pitchFamily="34" charset="-120"/>
               </a:rPr>
-              <a:t>Even Keel · December 2026 CEA link · for managers · 5</a:t>
+              <a:t>Even Keel · December 2026 link proposal · for managers · 5</a:t>
             </a:r>
             <a:endParaRPr lang="en-US" sz="900" dirty="0"/>
           </a:p>
@@ -5447,8 +5498,8 @@
         </p:nvSpPr>
         <p:spPr>
           <a:xfrm>
-            <a:off x="4297680" y="1417320"/>
-            <a:ext cx="2194560" cy="320040"/>
+            <a:off x="4663440" y="1417320"/>
+            <a:ext cx="2011680" cy="320040"/>
           </a:xfrm>
           <a:prstGeom prst="rect">
             <a:avLst/>
@@ -5486,8 +5537,8 @@
         </p:nvSpPr>
         <p:spPr>
           <a:xfrm>
-            <a:off x="6492240" y="1417320"/>
-            <a:ext cx="2194560" cy="320040"/>
+            <a:off x="6675120" y="1417320"/>
+            <a:ext cx="2011680" cy="320040"/>
           </a:xfrm>
           <a:prstGeom prst="rect">
             <a:avLst/>
@@ -5526,7 +5577,7 @@
         <p:spPr>
           <a:xfrm>
             <a:off x="457200" y="1801368"/>
-            <a:ext cx="8229600" cy="475488"/>
+            <a:ext cx="8229600" cy="365760"/>
           </a:xfrm>
           <a:prstGeom prst="roundRect">
             <a:avLst>
@@ -5553,7 +5604,7 @@
         <p:spPr>
           <a:xfrm>
             <a:off x="640080" y="1801368"/>
-            <a:ext cx="3657600" cy="475488"/>
+            <a:ext cx="4023360" cy="365760"/>
           </a:xfrm>
           <a:prstGeom prst="rect">
             <a:avLst/>
@@ -5591,8 +5642,8 @@
         </p:nvSpPr>
         <p:spPr>
           <a:xfrm>
-            <a:off x="4297680" y="1801368"/>
-            <a:ext cx="2194560" cy="475488"/>
+            <a:off x="4663440" y="1801368"/>
+            <a:ext cx="2011680" cy="365760"/>
           </a:xfrm>
           <a:prstGeom prst="rect">
             <a:avLst/>
@@ -5630,8 +5681,8 @@
         </p:nvSpPr>
         <p:spPr>
           <a:xfrm>
-            <a:off x="6492240" y="1801368"/>
-            <a:ext cx="2194560" cy="475488"/>
+            <a:off x="6675120" y="1801368"/>
+            <a:ext cx="2011680" cy="365760"/>
           </a:xfrm>
           <a:prstGeom prst="rect">
             <a:avLst/>
@@ -5669,8 +5720,8 @@
         </p:nvSpPr>
         <p:spPr>
           <a:xfrm>
-            <a:off x="457200" y="2368296"/>
-            <a:ext cx="8229600" cy="475488"/>
+            <a:off x="457200" y="2240280"/>
+            <a:ext cx="8229600" cy="365760"/>
           </a:xfrm>
           <a:prstGeom prst="roundRect">
             <a:avLst>
@@ -5696,8 +5747,8 @@
         </p:nvSpPr>
         <p:spPr>
           <a:xfrm>
-            <a:off x="640080" y="2368296"/>
-            <a:ext cx="3657600" cy="475488"/>
+            <a:off x="640080" y="2240280"/>
+            <a:ext cx="4023360" cy="365760"/>
           </a:xfrm>
           <a:prstGeom prst="rect">
             <a:avLst/>
@@ -5735,8 +5786,8 @@
         </p:nvSpPr>
         <p:spPr>
           <a:xfrm>
-            <a:off x="4297680" y="2368296"/>
-            <a:ext cx="2194560" cy="475488"/>
+            <a:off x="4663440" y="2240280"/>
+            <a:ext cx="2011680" cy="365760"/>
           </a:xfrm>
           <a:prstGeom prst="rect">
             <a:avLst/>
@@ -5774,8 +5825,8 @@
         </p:nvSpPr>
         <p:spPr>
           <a:xfrm>
-            <a:off x="6492240" y="2368296"/>
-            <a:ext cx="2194560" cy="475488"/>
+            <a:off x="6675120" y="2240280"/>
+            <a:ext cx="2011680" cy="365760"/>
           </a:xfrm>
           <a:prstGeom prst="rect">
             <a:avLst/>
@@ -5813,8 +5864,8 @@
         </p:nvSpPr>
         <p:spPr>
           <a:xfrm>
-            <a:off x="457200" y="2935224"/>
-            <a:ext cx="8229600" cy="475488"/>
+            <a:off x="457200" y="2679192"/>
+            <a:ext cx="8229600" cy="365760"/>
           </a:xfrm>
           <a:prstGeom prst="roundRect">
             <a:avLst>
@@ -5840,8 +5891,8 @@
         </p:nvSpPr>
         <p:spPr>
           <a:xfrm>
-            <a:off x="640080" y="2935224"/>
-            <a:ext cx="3657600" cy="475488"/>
+            <a:off x="640080" y="2679192"/>
+            <a:ext cx="4023360" cy="365760"/>
           </a:xfrm>
           <a:prstGeom prst="rect">
             <a:avLst/>
@@ -5879,8 +5930,8 @@
         </p:nvSpPr>
         <p:spPr>
           <a:xfrm>
-            <a:off x="4297680" y="2935224"/>
-            <a:ext cx="2194560" cy="475488"/>
+            <a:off x="4663440" y="2679192"/>
+            <a:ext cx="2011680" cy="365760"/>
           </a:xfrm>
           <a:prstGeom prst="rect">
             <a:avLst/>
@@ -5918,8 +5969,8 @@
         </p:nvSpPr>
         <p:spPr>
           <a:xfrm>
-            <a:off x="6492240" y="2935224"/>
-            <a:ext cx="2194560" cy="475488"/>
+            <a:off x="6675120" y="2679192"/>
+            <a:ext cx="2011680" cy="365760"/>
           </a:xfrm>
           <a:prstGeom prst="rect">
             <a:avLst/>
@@ -5957,8 +6008,8 @@
         </p:nvSpPr>
         <p:spPr>
           <a:xfrm>
-            <a:off x="457200" y="3502152"/>
-            <a:ext cx="8229600" cy="475488"/>
+            <a:off x="457200" y="3118104"/>
+            <a:ext cx="8229600" cy="365760"/>
           </a:xfrm>
           <a:prstGeom prst="roundRect">
             <a:avLst>
@@ -5984,8 +6035,8 @@
         </p:nvSpPr>
         <p:spPr>
           <a:xfrm>
-            <a:off x="640080" y="3502152"/>
-            <a:ext cx="3657600" cy="475488"/>
+            <a:off x="640080" y="3118104"/>
+            <a:ext cx="4023360" cy="365760"/>
           </a:xfrm>
           <a:prstGeom prst="rect">
             <a:avLst/>
@@ -6023,8 +6074,8 @@
         </p:nvSpPr>
         <p:spPr>
           <a:xfrm>
-            <a:off x="4297680" y="3502152"/>
-            <a:ext cx="2194560" cy="475488"/>
+            <a:off x="4663440" y="3118104"/>
+            <a:ext cx="2011680" cy="365760"/>
           </a:xfrm>
           <a:prstGeom prst="rect">
             <a:avLst/>
@@ -6062,8 +6113,8 @@
         </p:nvSpPr>
         <p:spPr>
           <a:xfrm>
-            <a:off x="6492240" y="3502152"/>
-            <a:ext cx="2194560" cy="475488"/>
+            <a:off x="6675120" y="3118104"/>
+            <a:ext cx="2011680" cy="365760"/>
           </a:xfrm>
           <a:prstGeom prst="rect">
             <a:avLst/>
@@ -6192,7 +6243,7 @@
                 <a:ea typeface="Inter" pitchFamily="34" charset="-122"/>
                 <a:cs typeface="Inter" pitchFamily="34" charset="-120"/>
               </a:rPr>
-              <a:t>Even Keel · December 2026 CEA link · for managers · 6</a:t>
+              <a:t>Even Keel · December 2026 link proposal · for managers · 6</a:t>
             </a:r>
             <a:endParaRPr lang="en-US" sz="900" dirty="0"/>
           </a:p>
@@ -6405,7 +6456,7 @@
                 <a:ea typeface="Inter" pitchFamily="34" charset="-122"/>
                 <a:cs typeface="Inter" pitchFamily="34" charset="-120"/>
               </a:rPr>
-              <a:t>All three shortlisted: all 9 December rules and the 3 flexible ones; no fatigue warning</a:t>
+              <a:t>All three shortlisted: all 9 December rules, all 3 flexible ones, no fatigue warning</a:t>
             </a:r>
             <a:endParaRPr lang="en-US" sz="1500" dirty="0"/>
           </a:p>
@@ -6419,7 +6470,7 @@
         </p:nvSpPr>
         <p:spPr>
           <a:xfrm>
-            <a:off x="457200" y="1728216"/>
+            <a:off x="457200" y="1783080"/>
             <a:ext cx="292608" cy="292608"/>
           </a:xfrm>
           <a:prstGeom prst="ellipse">
@@ -6444,7 +6495,7 @@
         </p:nvSpPr>
         <p:spPr>
           <a:xfrm>
-            <a:off x="457200" y="1728216"/>
+            <a:off x="457200" y="1783080"/>
             <a:ext cx="292608" cy="292608"/>
           </a:xfrm>
           <a:prstGeom prst="rect">
@@ -6483,7 +6534,7 @@
         </p:nvSpPr>
         <p:spPr>
           <a:xfrm>
-            <a:off x="914400" y="1709928"/>
+            <a:off x="914400" y="1764792"/>
             <a:ext cx="7772400" cy="329184"/>
           </a:xfrm>
           <a:prstGeom prst="rect">
@@ -6522,7 +6573,7 @@
         </p:nvSpPr>
         <p:spPr>
           <a:xfrm>
-            <a:off x="457200" y="2130552"/>
+            <a:off x="457200" y="2240280"/>
             <a:ext cx="292608" cy="292608"/>
           </a:xfrm>
           <a:prstGeom prst="ellipse">
@@ -6547,7 +6598,7 @@
         </p:nvSpPr>
         <p:spPr>
           <a:xfrm>
-            <a:off x="457200" y="2130552"/>
+            <a:off x="457200" y="2240280"/>
             <a:ext cx="292608" cy="292608"/>
           </a:xfrm>
           <a:prstGeom prst="rect">
@@ -6586,7 +6637,7 @@
         </p:nvSpPr>
         <p:spPr>
           <a:xfrm>
-            <a:off x="914400" y="2112264"/>
+            <a:off x="914400" y="2221992"/>
             <a:ext cx="7772400" cy="329184"/>
           </a:xfrm>
           <a:prstGeom prst="rect">
@@ -6625,7 +6676,7 @@
         </p:nvSpPr>
         <p:spPr>
           <a:xfrm>
-            <a:off x="457200" y="2532888"/>
+            <a:off x="457200" y="2697480"/>
             <a:ext cx="292608" cy="292608"/>
           </a:xfrm>
           <a:prstGeom prst="ellipse">
@@ -6650,7 +6701,7 @@
         </p:nvSpPr>
         <p:spPr>
           <a:xfrm>
-            <a:off x="457200" y="2532888"/>
+            <a:off x="457200" y="2697480"/>
             <a:ext cx="292608" cy="292608"/>
           </a:xfrm>
           <a:prstGeom prst="rect">
@@ -6689,7 +6740,7 @@
         </p:nvSpPr>
         <p:spPr>
           <a:xfrm>
-            <a:off x="914400" y="2514600"/>
+            <a:off x="914400" y="2679192"/>
             <a:ext cx="7772400" cy="329184"/>
           </a:xfrm>
           <a:prstGeom prst="rect">
@@ -6728,7 +6779,7 @@
         </p:nvSpPr>
         <p:spPr>
           <a:xfrm>
-            <a:off x="457200" y="2935224"/>
+            <a:off x="457200" y="3154680"/>
             <a:ext cx="292608" cy="292608"/>
           </a:xfrm>
           <a:prstGeom prst="ellipse">
@@ -6753,7 +6804,7 @@
         </p:nvSpPr>
         <p:spPr>
           <a:xfrm>
-            <a:off x="457200" y="2935224"/>
+            <a:off x="457200" y="3154680"/>
             <a:ext cx="292608" cy="292608"/>
           </a:xfrm>
           <a:prstGeom prst="rect">
@@ -6792,7 +6843,7 @@
         </p:nvSpPr>
         <p:spPr>
           <a:xfrm>
-            <a:off x="914400" y="2916936"/>
+            <a:off x="914400" y="3136392"/>
             <a:ext cx="7772400" cy="329184"/>
           </a:xfrm>
           <a:prstGeom prst="rect">
@@ -6831,7 +6882,7 @@
         </p:nvSpPr>
         <p:spPr>
           <a:xfrm>
-            <a:off x="457200" y="3337560"/>
+            <a:off x="457200" y="3611880"/>
             <a:ext cx="292608" cy="292608"/>
           </a:xfrm>
           <a:prstGeom prst="ellipse">
@@ -6856,7 +6907,7 @@
         </p:nvSpPr>
         <p:spPr>
           <a:xfrm>
-            <a:off x="457200" y="3337560"/>
+            <a:off x="457200" y="3611880"/>
             <a:ext cx="292608" cy="292608"/>
           </a:xfrm>
           <a:prstGeom prst="rect">
@@ -6895,7 +6946,7 @@
         </p:nvSpPr>
         <p:spPr>
           <a:xfrm>
-            <a:off x="914400" y="3319272"/>
+            <a:off x="914400" y="3593592"/>
             <a:ext cx="7772400" cy="329184"/>
           </a:xfrm>
           <a:prstGeom prst="rect">
@@ -6920,7 +6971,7 @@
                 <a:ea typeface="Inter" pitchFamily="34" charset="-122"/>
                 <a:cs typeface="Inter" pitchFamily="34" charset="-120"/>
               </a:rPr>
-              <a:t>Costs: 44 late finishes a year (today 39), a mixed week, four weeks off 15 days not 14</a:t>
+              <a:t>Costs: 44 late finishes (today 39), a mixed week, four weeks off 15 days, not 14</a:t>
             </a:r>
             <a:endParaRPr lang="en-US" sz="1500" dirty="0"/>
           </a:p>
@@ -7025,7 +7076,7 @@
                 <a:ea typeface="Inter" pitchFamily="34" charset="-122"/>
                 <a:cs typeface="Inter" pitchFamily="34" charset="-120"/>
               </a:rPr>
-              <a:t>Even Keel · December 2026 CEA link · for managers · 7</a:t>
+              <a:t>Even Keel · December 2026 link proposal · for managers · 7</a:t>
             </a:r>
             <a:endParaRPr lang="en-US" sz="900" dirty="0"/>
           </a:p>
@@ -7241,7 +7292,7 @@
         <p:spPr>
           <a:xfrm>
             <a:off x="731520" y="1901952"/>
-            <a:ext cx="3611880" cy="2011680"/>
+            <a:ext cx="3657600" cy="2011680"/>
           </a:xfrm>
           <a:prstGeom prst="rect">
             <a:avLst/>
@@ -7255,9 +7306,10 @@
           <a:p>
             <a:pPr marL="152400" indent="-152400">
               <a:spcAft>
-                <a:spcPts val="600"/>
+                <a:spcPts val="1000"/>
               </a:spcAft>
               <a:buSzPct val="100000"/>
+              <a:buFont typeface="Inter" pitchFamily="34" charset="0"/>
               <a:buChar char="•"/>
             </a:pPr>
             <a:r>
@@ -7269,16 +7321,17 @@
                 <a:ea typeface="Inter" pitchFamily="34" charset="-122"/>
                 <a:cs typeface="Inter" pitchFamily="34" charset="-120"/>
               </a:rPr>
-              <a:t>14 full weekends off a year (today 10), at most 5 apart</a:t>
+              <a:t>14 full weekends off a year (today 10)</a:t>
             </a:r>
             <a:endParaRPr lang="en-US" sz="1300" dirty="0"/>
           </a:p>
           <a:p>
             <a:pPr marL="152400" indent="-152400">
               <a:spcAft>
-                <a:spcPts val="600"/>
+                <a:spcPts val="1000"/>
               </a:spcAft>
               <a:buSzPct val="100000"/>
+              <a:buFont typeface="Inter" pitchFamily="34" charset="0"/>
               <a:buChar char="•"/>
             </a:pPr>
             <a:r>
@@ -7290,16 +7343,17 @@
                 <a:ea typeface="Inter" pitchFamily="34" charset="-122"/>
                 <a:cs typeface="Inter" pitchFamily="34" charset="-120"/>
               </a:rPr>
-              <a:t>One shift time in 18 of 21 weeks (today 7 of 16)</a:t>
+              <a:t>One turn in 18 of 21 weeks (today 7 of 16)</a:t>
             </a:r>
             <a:endParaRPr lang="en-US" sz="1300" dirty="0"/>
           </a:p>
           <a:p>
             <a:pPr marL="152400" indent="-152400">
               <a:spcAft>
-                <a:spcPts val="600"/>
+                <a:spcPts val="1000"/>
               </a:spcAft>
               <a:buSzPct val="100000"/>
+              <a:buFont typeface="Inter" pitchFamily="34" charset="0"/>
               <a:buChar char="•"/>
             </a:pPr>
             <a:r>
@@ -7311,16 +7365,17 @@
                 <a:ea typeface="Inter" pitchFamily="34" charset="-122"/>
                 <a:cs typeface="Inter" pitchFamily="34" charset="-120"/>
               </a:rPr>
-              <a:t>At most 5 days in a row on the fixed rota (today 7)</a:t>
+              <a:t>At most 5 days in a row, fixed rota (today 7)</a:t>
             </a:r>
             <a:endParaRPr lang="en-US" sz="1300" dirty="0"/>
           </a:p>
           <a:p>
             <a:pPr marL="152400" indent="-152400">
               <a:spcAft>
-                <a:spcPts val="600"/>
+                <a:spcPts val="1000"/>
               </a:spcAft>
               <a:buSzPct val="100000"/>
+              <a:buFont typeface="Inter" pitchFamily="34" charset="0"/>
               <a:buChar char="•"/>
             </a:pPr>
             <a:r>
@@ -7339,9 +7394,10 @@
           <a:p>
             <a:pPr marL="152400" indent="-152400">
               <a:spcAft>
-                <a:spcPts val="600"/>
+                <a:spcPts val="1000"/>
               </a:spcAft>
               <a:buSzPct val="100000"/>
+              <a:buFont typeface="Inter" pitchFamily="34" charset="0"/>
               <a:buChar char="•"/>
             </a:pPr>
             <a:r>
@@ -7459,7 +7515,7 @@
         <p:spPr>
           <a:xfrm>
             <a:off x="4937760" y="1901952"/>
-            <a:ext cx="3611880" cy="2011680"/>
+            <a:ext cx="3657600" cy="2011680"/>
           </a:xfrm>
           <a:prstGeom prst="rect">
             <a:avLst/>
@@ -7473,9 +7529,10 @@
           <a:p>
             <a:pPr marL="152400" indent="-152400">
               <a:spcAft>
-                <a:spcPts val="600"/>
+                <a:spcPts val="1000"/>
               </a:spcAft>
               <a:buSzPct val="100000"/>
+              <a:buFont typeface="Inter" pitchFamily="34" charset="0"/>
               <a:buChar char="•"/>
             </a:pPr>
             <a:r>
@@ -7494,9 +7551,10 @@
           <a:p>
             <a:pPr marL="152400" indent="-152400">
               <a:spcAft>
-                <a:spcPts val="600"/>
+                <a:spcPts val="1000"/>
               </a:spcAft>
               <a:buSzPct val="100000"/>
+              <a:buFont typeface="Inter" pitchFamily="34" charset="0"/>
               <a:buChar char="•"/>
             </a:pPr>
             <a:r>
@@ -7515,9 +7573,10 @@
           <a:p>
             <a:pPr marL="152400" indent="-152400">
               <a:spcAft>
-                <a:spcPts val="600"/>
+                <a:spcPts val="1000"/>
               </a:spcAft>
               <a:buSzPct val="100000"/>
+              <a:buFont typeface="Inter" pitchFamily="34" charset="0"/>
               <a:buChar char="•"/>
             </a:pPr>
             <a:r>
@@ -7536,9 +7595,10 @@
           <a:p>
             <a:pPr marL="152400" indent="-152400">
               <a:spcAft>
-                <a:spcPts val="600"/>
+                <a:spcPts val="1000"/>
               </a:spcAft>
               <a:buSzPct val="100000"/>
+              <a:buFont typeface="Inter" pitchFamily="34" charset="0"/>
               <a:buChar char="•"/>
             </a:pPr>
             <a:r>
@@ -7557,9 +7617,10 @@
           <a:p>
             <a:pPr marL="152400" indent="-152400">
               <a:spcAft>
-                <a:spcPts val="600"/>
+                <a:spcPts val="1000"/>
               </a:spcAft>
               <a:buSzPct val="100000"/>
+              <a:buFont typeface="Inter" pitchFamily="34" charset="0"/>
               <a:buChar char="•"/>
             </a:pPr>
             <a:r>
@@ -7571,7 +7632,7 @@
                 <a:ea typeface="Inter" pitchFamily="34" charset="-122"/>
                 <a:cs typeface="Inter" pitchFamily="34" charset="-120"/>
               </a:rPr>
-              <a:t>Four weeks off takes 15 days’ leave at best, not 14</a:t>
+              <a:t>Four weeks off needs 15 days’ leave, not 14</a:t>
             </a:r>
             <a:endParaRPr lang="en-US" sz="1300" dirty="0"/>
           </a:p>
@@ -7676,7 +7737,7 @@
                 <a:ea typeface="Inter" pitchFamily="34" charset="-122"/>
                 <a:cs typeface="Inter" pitchFamily="34" charset="-120"/>
               </a:rPr>
-              <a:t>Even Keel · December 2026 CEA link · for managers · 8</a:t>
+              <a:t>Even Keel · December 2026 link proposal · for managers · 8</a:t>
             </a:r>
             <a:endParaRPr lang="en-US" sz="900" dirty="0"/>
           </a:p>
@@ -7942,7 +8003,7 @@
         </p:nvSpPr>
         <p:spPr>
           <a:xfrm>
-            <a:off x="457200" y="1965960"/>
+            <a:off x="457200" y="1874520"/>
             <a:ext cx="457200" cy="457200"/>
           </a:xfrm>
           <a:prstGeom prst="ellipse">
@@ -7967,7 +8028,7 @@
         </p:nvSpPr>
         <p:spPr>
           <a:xfrm>
-            <a:off x="457200" y="1965960"/>
+            <a:off x="457200" y="1874520"/>
             <a:ext cx="457200" cy="457200"/>
           </a:xfrm>
           <a:prstGeom prst="rect">
@@ -8006,7 +8067,7 @@
         </p:nvSpPr>
         <p:spPr>
           <a:xfrm>
-            <a:off x="1097280" y="1929384"/>
+            <a:off x="1097280" y="1837944"/>
             <a:ext cx="7589520" cy="292608"/>
           </a:xfrm>
           <a:prstGeom prst="rect">
@@ -8045,7 +8106,7 @@
         </p:nvSpPr>
         <p:spPr>
           <a:xfrm>
-            <a:off x="1097280" y="2212848"/>
+            <a:off x="1097280" y="2121408"/>
             <a:ext cx="7589520" cy="274320"/>
           </a:xfrm>
           <a:prstGeom prst="rect">
@@ -8084,7 +8145,7 @@
         </p:nvSpPr>
         <p:spPr>
           <a:xfrm>
-            <a:off x="457200" y="2606040"/>
+            <a:off x="457200" y="2423160"/>
             <a:ext cx="457200" cy="457200"/>
           </a:xfrm>
           <a:prstGeom prst="ellipse">
@@ -8109,7 +8170,7 @@
         </p:nvSpPr>
         <p:spPr>
           <a:xfrm>
-            <a:off x="457200" y="2606040"/>
+            <a:off x="457200" y="2423160"/>
             <a:ext cx="457200" cy="457200"/>
           </a:xfrm>
           <a:prstGeom prst="rect">
@@ -8148,7 +8209,7 @@
         </p:nvSpPr>
         <p:spPr>
           <a:xfrm>
-            <a:off x="1097280" y="2569464"/>
+            <a:off x="1097280" y="2386584"/>
             <a:ext cx="7589520" cy="292608"/>
           </a:xfrm>
           <a:prstGeom prst="rect">
@@ -8187,7 +8248,7 @@
         </p:nvSpPr>
         <p:spPr>
           <a:xfrm>
-            <a:off x="1097280" y="2852928"/>
+            <a:off x="1097280" y="2670048"/>
             <a:ext cx="7589520" cy="274320"/>
           </a:xfrm>
           <a:prstGeom prst="rect">
@@ -8226,7 +8287,7 @@
         </p:nvSpPr>
         <p:spPr>
           <a:xfrm>
-            <a:off x="457200" y="3246120"/>
+            <a:off x="457200" y="2971800"/>
             <a:ext cx="457200" cy="457200"/>
           </a:xfrm>
           <a:prstGeom prst="ellipse">
@@ -8251,7 +8312,7 @@
         </p:nvSpPr>
         <p:spPr>
           <a:xfrm>
-            <a:off x="457200" y="3246120"/>
+            <a:off x="457200" y="2971800"/>
             <a:ext cx="457200" cy="457200"/>
           </a:xfrm>
           <a:prstGeom prst="rect">
@@ -8290,7 +8351,7 @@
         </p:nvSpPr>
         <p:spPr>
           <a:xfrm>
-            <a:off x="1097280" y="3209544"/>
+            <a:off x="1097280" y="2935224"/>
             <a:ext cx="7589520" cy="292608"/>
           </a:xfrm>
           <a:prstGeom prst="rect">
@@ -8329,7 +8390,7 @@
         </p:nvSpPr>
         <p:spPr>
           <a:xfrm>
-            <a:off x="1097280" y="3493008"/>
+            <a:off x="1097280" y="3218688"/>
             <a:ext cx="7589520" cy="274320"/>
           </a:xfrm>
           <a:prstGeom prst="rect">
@@ -8368,7 +8429,7 @@
         </p:nvSpPr>
         <p:spPr>
           <a:xfrm>
-            <a:off x="457200" y="3886200"/>
+            <a:off x="457200" y="3520440"/>
             <a:ext cx="457200" cy="457200"/>
           </a:xfrm>
           <a:prstGeom prst="ellipse">
@@ -8393,7 +8454,7 @@
         </p:nvSpPr>
         <p:spPr>
           <a:xfrm>
-            <a:off x="457200" y="3886200"/>
+            <a:off x="457200" y="3520440"/>
             <a:ext cx="457200" cy="457200"/>
           </a:xfrm>
           <a:prstGeom prst="rect">
@@ -8432,7 +8493,7 @@
         </p:nvSpPr>
         <p:spPr>
           <a:xfrm>
-            <a:off x="1097280" y="3849624"/>
+            <a:off x="1097280" y="3483864"/>
             <a:ext cx="7589520" cy="292608"/>
           </a:xfrm>
           <a:prstGeom prst="rect">
@@ -8471,7 +8532,7 @@
         </p:nvSpPr>
         <p:spPr>
           <a:xfrm>
-            <a:off x="1097280" y="4133088"/>
+            <a:off x="1097280" y="3767328"/>
             <a:ext cx="7589520" cy="274320"/>
           </a:xfrm>
           <a:prstGeom prst="rect">
@@ -8499,6 +8560,70 @@
               <a:t>Who begins on which week. Open: the 13-day limit’s written source; the FF19 reading.</a:t>
             </a:r>
             <a:endParaRPr lang="en-US" sz="1300" dirty="0"/>
+          </a:p>
+        </p:txBody>
+      </p:sp>
+      <p:sp>
+        <p:nvSpPr>
+          <p:cNvPr id="25" name="Banner"/>
+          <p:cNvSpPr/>
+          <p:nvPr/>
+        </p:nvSpPr>
+        <p:spPr>
+          <a:xfrm>
+            <a:off x="457200" y="4160520"/>
+            <a:ext cx="8229600" cy="548640"/>
+          </a:xfrm>
+          <a:prstGeom prst="roundRect">
+            <a:avLst>
+              <a:gd name="adj" fmla="val 16667"/>
+            </a:avLst>
+          </a:prstGeom>
+          <a:solidFill>
+            <a:srgbClr val="001E3C"/>
+          </a:solidFill>
+          <a:ln w="12700">
+            <a:solidFill>
+              <a:srgbClr val="001E3C"/>
+            </a:solidFill>
+            <a:prstDash val="solid"/>
+          </a:ln>
+        </p:spPr>
+      </p:sp>
+      <p:sp>
+        <p:nvSpPr>
+          <p:cNvPr id="26" name="Banner text"/>
+          <p:cNvSpPr txBox="1"/>
+          <p:nvPr/>
+        </p:nvSpPr>
+        <p:spPr>
+          <a:xfrm>
+            <a:off x="640080" y="4160520"/>
+            <a:ext cx="7863840" cy="548640"/>
+          </a:xfrm>
+          <a:prstGeom prst="rect">
+            <a:avLst/>
+          </a:prstGeom>
+          <a:noFill/>
+        </p:spPr>
+        <p:txBody>
+          <a:bodyPr wrap="square" lIns="0" tIns="0" rIns="0" bIns="0" rtlCol="0" anchor="ctr"/>
+          <a:lstStyle/>
+          <a:p>
+            <a:pPr indent="0" marL="0">
+              <a:buNone/>
+            </a:pPr>
+            <a:r>
+              <a:rPr lang="en-US" sz="1400" b="1" dirty="0">
+                <a:solidFill>
+                  <a:srgbClr val="FFFFFF"/>
+                </a:solidFill>
+                <a:latin typeface="Inter" pitchFamily="34" charset="0"/>
+                <a:ea typeface="Inter" pitchFamily="34" charset="-122"/>
+                <a:cs typeface="Inter" pitchFamily="34" charset="-120"/>
+              </a:rPr>
+              <a:t>Colleagues’ views come first; the link is chosen after them, then who starts where.</a:t>
+            </a:r>
           </a:p>
         </p:txBody>
       </p:sp>
@@ -8535,7 +8660,7 @@
                 <a:ea typeface="Inter" pitchFamily="34" charset="-122"/>
                 <a:cs typeface="Inter" pitchFamily="34" charset="-120"/>
               </a:rPr>
-              <a:t>Even Keel · December 2026 CEA link · for managers · 9</a:t>
+              <a:t>Even Keel · December 2026 link proposal · for managers · 9</a:t>
             </a:r>
             <a:endParaRPr lang="en-US" sz="900" dirty="0"/>
           </a:p>

--- a/docs/links-26/presentations/Even-Keel-for-managers.pptx
+++ b/docs/links-26/presentations/Even-Keel-for-managers.pptx
@@ -6353,7 +6353,7 @@
                 <a:ea typeface="Inter" pitchFamily="34" charset="-122"/>
                 <a:cs typeface="Inter" pitchFamily="34" charset="-120"/>
               </a:rPr>
-              <a:t>What all three shortlisted links give, what this one adds, and what it costs</a:t>
+              <a:t>What all four shortlisted links give, what this one adds, and what it costs</a:t>
             </a:r>
             <a:endParaRPr lang="en-US" sz="1500" dirty="0"/>
           </a:p>
@@ -6456,7 +6456,7 @@
                 <a:ea typeface="Inter" pitchFamily="34" charset="-122"/>
                 <a:cs typeface="Inter" pitchFamily="34" charset="-120"/>
               </a:rPr>
-              <a:t>All three shortlisted: all 9 December rules, all 3 flexible ones, no fatigue warning</a:t>
+              <a:t>All four shortlisted: all 9 December rules and no avoidable fatigue warning</a:t>
             </a:r>
             <a:endParaRPr lang="en-US" sz="1500" dirty="0"/>
           </a:p>
@@ -6559,7 +6559,7 @@
                 <a:ea typeface="Inter" pitchFamily="34" charset="-122"/>
                 <a:cs typeface="Inter" pitchFamily="34" charset="-120"/>
               </a:rPr>
-              <a:t>All three shortlisted: about 14 full weekends off a year (today 10), at most 5 apart</a:t>
+              <a:t>All four shortlisted: about 14 full weekends off a year (today 10), at most 5 apart</a:t>
             </a:r>
             <a:endParaRPr lang="en-US" sz="1500" dirty="0"/>
           </a:p>
@@ -6662,7 +6662,7 @@
                 <a:ea typeface="Inter" pitchFamily="34" charset="-122"/>
                 <a:cs typeface="Inter" pitchFamily="34" charset="-120"/>
               </a:rPr>
-              <a:t>All three shortlisted: no shift over 9 hours, and every closing shift shorter</a:t>
+              <a:t>All four shortlisted: no shift over 9 hours, and every closing shift shorter</a:t>
             </a:r>
             <a:endParaRPr lang="en-US" sz="1500" dirty="0"/>
           </a:p>

--- a/docs/links-26/presentations/Even-Keel-for-managers.pptx
+++ b/docs/links-26/presentations/Even-Keel-for-managers.pptx
@@ -6765,7 +6765,7 @@
                 <a:ea typeface="Inter" pitchFamily="34" charset="-122"/>
                 <a:cs typeface="Inter" pitchFamily="34" charset="-120"/>
               </a:rPr>
-              <a:t>This one adds: no week over 41h 30m, and at least 14h 35m between shifts</a:t>
+              <a:t>This one adds: a fourth person to the Saturday close (the others 3, today 2)</a:t>
             </a:r>
             <a:endParaRPr lang="en-US" sz="1500" dirty="0"/>
           </a:p>

--- a/docs/links-26/presentations/Even-Keel-for-managers.pptx
+++ b/docs/links-26/presentations/Even-Keel-for-managers.pptx
@@ -6353,7 +6353,7 @@
                 <a:ea typeface="Inter" pitchFamily="34" charset="-122"/>
                 <a:cs typeface="Inter" pitchFamily="34" charset="-120"/>
               </a:rPr>
-              <a:t>What all three shortlisted links give, what this one adds, and what it costs</a:t>
+              <a:t>What all four shortlisted links give, what this one adds, and what it costs</a:t>
             </a:r>
             <a:endParaRPr lang="en-US" sz="1500" dirty="0"/>
           </a:p>
@@ -6456,7 +6456,7 @@
                 <a:ea typeface="Inter" pitchFamily="34" charset="-122"/>
                 <a:cs typeface="Inter" pitchFamily="34" charset="-120"/>
               </a:rPr>
-              <a:t>All three shortlisted: all 9 December rules, all 3 flexible ones, no fatigue warning</a:t>
+              <a:t>All four shortlisted: all 9 December rules and no avoidable fatigue warning</a:t>
             </a:r>
             <a:endParaRPr lang="en-US" sz="1500" dirty="0"/>
           </a:p>
@@ -6559,7 +6559,7 @@
                 <a:ea typeface="Inter" pitchFamily="34" charset="-122"/>
                 <a:cs typeface="Inter" pitchFamily="34" charset="-120"/>
               </a:rPr>
-              <a:t>All three shortlisted: about 14 full weekends off a year (today 10), at most 5 apart</a:t>
+              <a:t>All four shortlisted: about 14 full weekends off a year (today 10), at most 5 apart</a:t>
             </a:r>
             <a:endParaRPr lang="en-US" sz="1500" dirty="0"/>
           </a:p>
@@ -6662,7 +6662,7 @@
                 <a:ea typeface="Inter" pitchFamily="34" charset="-122"/>
                 <a:cs typeface="Inter" pitchFamily="34" charset="-120"/>
               </a:rPr>
-              <a:t>All three shortlisted: no shift over 9 hours, and every closing shift shorter</a:t>
+              <a:t>All four shortlisted: no shift over 9 hours, and every closing shift shorter</a:t>
             </a:r>
             <a:endParaRPr lang="en-US" sz="1500" dirty="0"/>
           </a:p>
@@ -6765,7 +6765,7 @@
                 <a:ea typeface="Inter" pitchFamily="34" charset="-122"/>
                 <a:cs typeface="Inter" pitchFamily="34" charset="-120"/>
               </a:rPr>
-              <a:t>This one adds: no week over 41h 30m, and at least 14h 35m between shifts</a:t>
+              <a:t>This one adds: a fourth person to the Saturday close (the others 3, today 2)</a:t>
             </a:r>
             <a:endParaRPr lang="en-US" sz="1500" dirty="0"/>
           </a:p>
